--- a/cppcon/CRG_Talk_FR.pptx
+++ b/cppcon/CRG_Talk_FR.pptx
@@ -5673,30 +5673,6 @@
           </a:p>
         </p:txBody>
       </p:sp>
-      <p:pic>
-        <p:nvPicPr>
-          <p:cNvPr id="4" name="Picture 3" descr="image.jpg"/>
-          <p:cNvPicPr>
-            <a:picLocks noChangeAspect="1"/>
-          </p:cNvPicPr>
-          <p:nvPr/>
-        </p:nvPicPr>
-        <p:blipFill>
-          <a:blip r:embed="rId2"/>
-          <a:stretch>
-            <a:fillRect/>
-          </a:stretch>
-        </p:blipFill>
-        <p:spPr>
-          <a:xfrm>
-            <a:off x="6583680" y="1645920"/>
-            <a:ext cx="5029200" cy="4303200"/>
-          </a:xfrm>
-          <a:prstGeom prst="rect">
-            <a:avLst/>
-          </a:prstGeom>
-        </p:spPr>
-      </p:pic>
     </p:spTree>
   </p:cSld>
   <p:clrMapOvr>

--- a/cppcon/CRG_Talk_FR.pptx
+++ b/cppcon/CRG_Talk_FR.pptx
@@ -23,6 +23,7 @@
     <p:sldId id="271" r:id="rId23"/>
     <p:sldId id="272" r:id="rId24"/>
     <p:sldId id="273" r:id="rId25"/>
+    <p:sldId id="274" r:id="rId26"/>
   </p:sldIdLst>
   <p:sldSz cx="12191695" cy="6858000" type="screen4x3"/>
   <p:notesSz cx="6858000" cy="9144000"/>
@@ -1009,7 +1010,7 @@
           <a:lstStyle/>
           <a:p>
             <a:r>
-              <a:t>TODO</a:t>
+              <a:t>Trois niveaux de vitesse. Niveau 1 : le dispatch classique par vtable OOP (~20ns). Niveau 2 : ModelShell Invoke, payant un saut virtuel pour l'effacement de type (~7ns) — idéal pour les chemins froids. Niveau 3 : ActiveCapability, résultat mis en cache et appelé directement via pointeur de fonction (1.5ns). Nous avons atteint la limite physique du matériel.</a:t>
             </a:r>
           </a:p>
         </p:txBody>
@@ -1079,7 +1080,7 @@
           <a:lstStyle/>
           <a:p>
             <a:r>
-              <a:t>TODO</a:t>
+              <a:t>C'est ici que l'on frappe le "Memory Wall". À 10% de mutation, l'ECS classique chute à 19 Go/s car le CPU passe son temps à déplacer de la mémoire plutôt qu'à exécuter de la logique. Le CRG maintient plus de 30 Go/s car la topologie est immuable. Notez le QR code à droite : vous pouvez le scanner dès maintenant pour accéder au simulateur live et vérifier ces mesures de performance sur votre propre appareil.</a:t>
             </a:r>
           </a:p>
         </p:txBody>
@@ -1149,7 +1150,77 @@
           <a:lstStyle/>
           <a:p>
             <a:r>
-              <a:t>TODO</a:t>
+              <a:t>Dans ce stress-test visuel à 50 000 entités, vous voyez le frame-time de l'ECS (en rouge) s'envoler dès que l'on introduit de la volatilité. Chaque changement d'archétype est une copie mémoire qui détruit la localité du cache. La ligne verte, c'est le CRG : elle reste plate car il traite les transitions comme des mises à jour de coordonnées, pas des recâblages structurels. N'hésitez pas à utiliser le lien du simulateur pour ajuster le taux de mutation vous-même.</a:t>
+            </a:r>
+          </a:p>
+        </p:txBody>
+      </p:sp>
+      <p:sp>
+        <p:nvSpPr>
+          <p:cNvPr id="4" name="Slide Number Placeholder 3"/>
+          <p:cNvSpPr>
+            <a:spLocks noGrp="1"/>
+          </p:cNvSpPr>
+          <p:nvPr>
+            <p:ph type="sldNum" idx="5" sz="quarter"/>
+          </p:nvPr>
+        </p:nvSpPr>
+        <p:spPr/>
+      </p:sp>
+    </p:spTree>
+  </p:cSld>
+  <p:clrMapOvr>
+    <a:masterClrMapping/>
+  </p:clrMapOvr>
+</p:notes>
+</file>
+
+<file path=ppt/notesSlides/notesSlide19.xml><?xml version="1.0" encoding="utf-8"?>
+<p:notes xmlns:a="http://schemas.openxmlformats.org/drawingml/2006/main" xmlns:p="http://schemas.openxmlformats.org/presentationml/2006/main" xmlns:r="http://schemas.openxmlformats.org/officeDocument/2006/relationships">
+  <p:cSld>
+    <p:spTree>
+      <p:nvGrpSpPr>
+        <p:cNvPr id="1" name=""/>
+        <p:cNvGrpSpPr/>
+        <p:nvPr/>
+      </p:nvGrpSpPr>
+      <p:grpSpPr>
+        <a:xfrm>
+          <a:off x="0" y="0"/>
+          <a:ext cx="0" cy="0"/>
+          <a:chOff x="0" y="0"/>
+          <a:chExt cx="0" cy="0"/>
+        </a:xfrm>
+      </p:grpSpPr>
+      <p:sp>
+        <p:nvSpPr>
+          <p:cNvPr id="2" name="Slide Image Placeholder 1"/>
+          <p:cNvSpPr>
+            <a:spLocks noGrp="1"/>
+          </p:cNvSpPr>
+          <p:nvPr>
+            <p:ph type="sldImg" idx="2"/>
+          </p:nvPr>
+        </p:nvSpPr>
+        <p:spPr/>
+      </p:sp>
+      <p:sp>
+        <p:nvSpPr>
+          <p:cNvPr id="3" name="Notes Placeholder 2"/>
+          <p:cNvSpPr>
+            <a:spLocks noGrp="1"/>
+          </p:cNvSpPr>
+          <p:nvPr>
+            <p:ph type="body" idx="3" sz="quarter"/>
+          </p:nvPr>
+        </p:nvSpPr>
+        <p:spPr/>
+        <p:txBody>
+          <a:bodyPr/>
+          <a:lstStyle/>
+          <a:p>
+            <a:r>
+              <a:t>Le CRG est un framework de dispatch piloté par le linker pour tout système C++ exigeant découplage et performance. Trois garanties : Zéro couplage (auto-enregistrement), Zéro recherche (coordonnées mathématiques), Zéro migration (topologie immuable). Arrêtez de vous battre contre le C++ et le matériel. Donnez-leur ce pour quoi ils ont été conçus.</a:t>
             </a:r>
           </a:p>
         </p:txBody>
@@ -4770,12 +4841,12 @@
           </a:solidFill>
         </p:spPr>
         <p:txBody>
-          <a:bodyPr wrap="square">
+          <a:bodyPr wrap="none">
             <a:spAutoFit/>
           </a:bodyPr>
           <a:lstStyle/>
           <a:p>
-            <a:pPr algn="l">
+            <a:pPr>
               <a:defRPr sz="1300">
                 <a:solidFill>
                   <a:srgbClr val="DCDCDC"/>
@@ -4788,7 +4859,7 @@
             </a:r>
           </a:p>
           <a:p>
-            <a:pPr algn="l">
+            <a:pPr>
               <a:defRPr sz="1300">
                 <a:solidFill>
                   <a:srgbClr val="DCDCDC"/>
@@ -4801,7 +4872,7 @@
             </a:r>
           </a:p>
           <a:p>
-            <a:pPr algn="l">
+            <a:pPr>
               <a:defRPr sz="1300">
                 <a:solidFill>
                   <a:srgbClr val="DCDCDC"/>
@@ -4814,17 +4885,17 @@
             </a:r>
           </a:p>
           <a:p>
-            <a:pPr algn="l">
-              <a:defRPr sz="1300">
-                <a:solidFill>
-                  <a:srgbClr val="DCDCDC"/>
-                </a:solidFill>
-                <a:latin typeface="Consolas"/>
-              </a:defRPr>
-            </a:pPr>
-          </a:p>
-          <a:p>
-            <a:pPr algn="l">
+            <a:pPr>
+              <a:defRPr sz="1300">
+                <a:solidFill>
+                  <a:srgbClr val="DCDCDC"/>
+                </a:solidFill>
+                <a:latin typeface="Consolas"/>
+              </a:defRPr>
+            </a:pPr>
+          </a:p>
+          <a:p>
+            <a:pPr>
               <a:defRPr sz="1300">
                 <a:solidFill>
                   <a:srgbClr val="DCDCDC"/>
@@ -4837,7 +4908,7 @@
             </a:r>
           </a:p>
           <a:p>
-            <a:pPr algn="l">
+            <a:pPr>
               <a:defRPr sz="1300">
                 <a:solidFill>
                   <a:srgbClr val="DCDCDC"/>
@@ -4850,7 +4921,7 @@
             </a:r>
           </a:p>
           <a:p>
-            <a:pPr algn="l">
+            <a:pPr>
               <a:defRPr sz="1300">
                 <a:solidFill>
                   <a:srgbClr val="DCDCDC"/>
@@ -4863,7 +4934,7 @@
             </a:r>
           </a:p>
           <a:p>
-            <a:pPr algn="l">
+            <a:pPr>
               <a:defRPr sz="1300">
                 <a:solidFill>
                   <a:srgbClr val="DCDCDC"/>
@@ -4876,7 +4947,7 @@
             </a:r>
           </a:p>
           <a:p>
-            <a:pPr algn="l">
+            <a:pPr>
               <a:defRPr sz="1300">
                 <a:solidFill>
                   <a:srgbClr val="DCDCDC"/>
@@ -4987,12 +5058,12 @@
           </a:solidFill>
         </p:spPr>
         <p:txBody>
-          <a:bodyPr wrap="square">
+          <a:bodyPr wrap="none">
             <a:spAutoFit/>
           </a:bodyPr>
           <a:lstStyle/>
           <a:p>
-            <a:pPr algn="l">
+            <a:pPr>
               <a:defRPr sz="1300">
                 <a:solidFill>
                   <a:srgbClr val="DCDCDC"/>
@@ -5005,7 +5076,7 @@
             </a:r>
           </a:p>
           <a:p>
-            <a:pPr algn="l">
+            <a:pPr>
               <a:defRPr sz="1300">
                 <a:solidFill>
                   <a:srgbClr val="DCDCDC"/>
@@ -5018,7 +5089,7 @@
             </a:r>
           </a:p>
           <a:p>
-            <a:pPr algn="l">
+            <a:pPr>
               <a:defRPr sz="1300">
                 <a:solidFill>
                   <a:srgbClr val="DCDCDC"/>
@@ -5031,7 +5102,7 @@
             </a:r>
           </a:p>
           <a:p>
-            <a:pPr algn="l">
+            <a:pPr>
               <a:defRPr sz="1300">
                 <a:solidFill>
                   <a:srgbClr val="DCDCDC"/>
@@ -5044,7 +5115,7 @@
             </a:r>
           </a:p>
           <a:p>
-            <a:pPr algn="l">
+            <a:pPr>
               <a:defRPr sz="1300">
                 <a:solidFill>
                   <a:srgbClr val="DCDCDC"/>
@@ -5155,12 +5226,12 @@
           </a:solidFill>
         </p:spPr>
         <p:txBody>
-          <a:bodyPr wrap="square">
+          <a:bodyPr wrap="none">
             <a:spAutoFit/>
           </a:bodyPr>
           <a:lstStyle/>
           <a:p>
-            <a:pPr algn="l">
+            <a:pPr>
               <a:defRPr sz="1300">
                 <a:solidFill>
                   <a:srgbClr val="DCDCDC"/>
@@ -5173,7 +5244,7 @@
             </a:r>
           </a:p>
           <a:p>
-            <a:pPr algn="l">
+            <a:pPr>
               <a:defRPr sz="1300">
                 <a:solidFill>
                   <a:srgbClr val="DCDCDC"/>
@@ -5186,7 +5257,7 @@
             </a:r>
           </a:p>
           <a:p>
-            <a:pPr algn="l">
+            <a:pPr>
               <a:defRPr sz="1300">
                 <a:solidFill>
                   <a:srgbClr val="DCDCDC"/>
@@ -5199,17 +5270,17 @@
             </a:r>
           </a:p>
           <a:p>
-            <a:pPr algn="l">
-              <a:defRPr sz="1300">
-                <a:solidFill>
-                  <a:srgbClr val="DCDCDC"/>
-                </a:solidFill>
-                <a:latin typeface="Consolas"/>
-              </a:defRPr>
-            </a:pPr>
-          </a:p>
-          <a:p>
-            <a:pPr algn="l">
+            <a:pPr>
+              <a:defRPr sz="1300">
+                <a:solidFill>
+                  <a:srgbClr val="DCDCDC"/>
+                </a:solidFill>
+                <a:latin typeface="Consolas"/>
+              </a:defRPr>
+            </a:pPr>
+          </a:p>
+          <a:p>
+            <a:pPr>
               <a:defRPr sz="1300">
                 <a:solidFill>
                   <a:srgbClr val="DCDCDC"/>
@@ -5222,7 +5293,7 @@
             </a:r>
           </a:p>
           <a:p>
-            <a:pPr algn="l">
+            <a:pPr>
               <a:defRPr sz="1300">
                 <a:solidFill>
                   <a:srgbClr val="DCDCDC"/>
@@ -5235,7 +5306,7 @@
             </a:r>
           </a:p>
           <a:p>
-            <a:pPr algn="l">
+            <a:pPr>
               <a:defRPr sz="1300">
                 <a:solidFill>
                   <a:srgbClr val="DCDCDC"/>
@@ -5248,7 +5319,7 @@
             </a:r>
           </a:p>
           <a:p>
-            <a:pPr algn="l">
+            <a:pPr>
               <a:defRPr sz="1300">
                 <a:solidFill>
                   <a:srgbClr val="DCDCDC"/>
@@ -5261,7 +5332,7 @@
             </a:r>
           </a:p>
           <a:p>
-            <a:pPr algn="l">
+            <a:pPr>
               <a:defRPr sz="1300">
                 <a:solidFill>
                   <a:srgbClr val="DCDCDC"/>
@@ -5274,7 +5345,7 @@
             </a:r>
           </a:p>
           <a:p>
-            <a:pPr algn="l">
+            <a:pPr>
               <a:defRPr sz="1300">
                 <a:solidFill>
                   <a:srgbClr val="DCDCDC"/>
@@ -5287,7 +5358,7 @@
             </a:r>
           </a:p>
           <a:p>
-            <a:pPr algn="l">
+            <a:pPr>
               <a:defRPr sz="1300">
                 <a:solidFill>
                   <a:srgbClr val="DCDCDC"/>
@@ -5300,7 +5371,7 @@
             </a:r>
           </a:p>
           <a:p>
-            <a:pPr algn="l">
+            <a:pPr>
               <a:defRPr sz="1300">
                 <a:solidFill>
                   <a:srgbClr val="DCDCDC"/>
@@ -5411,12 +5482,12 @@
           </a:solidFill>
         </p:spPr>
         <p:txBody>
-          <a:bodyPr wrap="square">
+          <a:bodyPr wrap="none">
             <a:spAutoFit/>
           </a:bodyPr>
           <a:lstStyle/>
           <a:p>
-            <a:pPr algn="l">
+            <a:pPr>
               <a:defRPr sz="1300">
                 <a:solidFill>
                   <a:srgbClr val="DCDCDC"/>
@@ -5429,7 +5500,7 @@
             </a:r>
           </a:p>
           <a:p>
-            <a:pPr algn="l">
+            <a:pPr>
               <a:defRPr sz="1300">
                 <a:solidFill>
                   <a:srgbClr val="DCDCDC"/>
@@ -5442,17 +5513,17 @@
             </a:r>
           </a:p>
           <a:p>
-            <a:pPr algn="l">
-              <a:defRPr sz="1300">
-                <a:solidFill>
-                  <a:srgbClr val="DCDCDC"/>
-                </a:solidFill>
-                <a:latin typeface="Consolas"/>
-              </a:defRPr>
-            </a:pPr>
-          </a:p>
-          <a:p>
-            <a:pPr algn="l">
+            <a:pPr>
+              <a:defRPr sz="1300">
+                <a:solidFill>
+                  <a:srgbClr val="DCDCDC"/>
+                </a:solidFill>
+                <a:latin typeface="Consolas"/>
+              </a:defRPr>
+            </a:pPr>
+          </a:p>
+          <a:p>
+            <a:pPr>
               <a:defRPr sz="1300">
                 <a:solidFill>
                   <a:srgbClr val="DCDCDC"/>
@@ -5465,7 +5536,7 @@
             </a:r>
           </a:p>
           <a:p>
-            <a:pPr algn="l">
+            <a:pPr>
               <a:defRPr sz="1300">
                 <a:solidFill>
                   <a:srgbClr val="DCDCDC"/>
@@ -5576,12 +5647,12 @@
           </a:solidFill>
         </p:spPr>
         <p:txBody>
-          <a:bodyPr wrap="square">
+          <a:bodyPr wrap="none">
             <a:spAutoFit/>
           </a:bodyPr>
           <a:lstStyle/>
           <a:p>
-            <a:pPr algn="l">
+            <a:pPr>
               <a:defRPr sz="1300">
                 <a:solidFill>
                   <a:srgbClr val="DCDCDC"/>
@@ -5594,7 +5665,7 @@
             </a:r>
           </a:p>
           <a:p>
-            <a:pPr algn="l">
+            <a:pPr>
               <a:defRPr sz="1300">
                 <a:solidFill>
                   <a:srgbClr val="DCDCDC"/>
@@ -5607,7 +5678,7 @@
             </a:r>
           </a:p>
           <a:p>
-            <a:pPr algn="l">
+            <a:pPr>
               <a:defRPr sz="1300">
                 <a:solidFill>
                   <a:srgbClr val="DCDCDC"/>
@@ -5620,7 +5691,7 @@
             </a:r>
           </a:p>
           <a:p>
-            <a:pPr algn="l">
+            <a:pPr>
               <a:defRPr sz="1300">
                 <a:solidFill>
                   <a:srgbClr val="DCDCDC"/>
@@ -5633,7 +5704,7 @@
             </a:r>
           </a:p>
           <a:p>
-            <a:pPr algn="l">
+            <a:pPr>
               <a:defRPr sz="1300">
                 <a:solidFill>
                   <a:srgbClr val="DCDCDC"/>
@@ -5646,7 +5717,7 @@
             </a:r>
           </a:p>
           <a:p>
-            <a:pPr algn="l">
+            <a:pPr>
               <a:defRPr sz="1300">
                 <a:solidFill>
                   <a:srgbClr val="DCDCDC"/>
@@ -5659,7 +5730,7 @@
             </a:r>
           </a:p>
           <a:p>
-            <a:pPr algn="l">
+            <a:pPr>
               <a:defRPr sz="1300">
                 <a:solidFill>
                   <a:srgbClr val="DCDCDC"/>
@@ -5746,12 +5817,12 @@
           </a:solidFill>
         </p:spPr>
         <p:txBody>
-          <a:bodyPr wrap="square">
+          <a:bodyPr wrap="none">
             <a:spAutoFit/>
           </a:bodyPr>
           <a:lstStyle/>
           <a:p>
-            <a:pPr algn="l">
+            <a:pPr>
               <a:defRPr sz="1300">
                 <a:solidFill>
                   <a:srgbClr val="DCDCDC"/>
@@ -5764,7 +5835,7 @@
             </a:r>
           </a:p>
           <a:p>
-            <a:pPr algn="l">
+            <a:pPr>
               <a:defRPr sz="1300">
                 <a:solidFill>
                   <a:srgbClr val="DCDCDC"/>
@@ -5777,17 +5848,17 @@
             </a:r>
           </a:p>
           <a:p>
-            <a:pPr algn="l">
-              <a:defRPr sz="1300">
-                <a:solidFill>
-                  <a:srgbClr val="DCDCDC"/>
-                </a:solidFill>
-                <a:latin typeface="Consolas"/>
-              </a:defRPr>
-            </a:pPr>
-          </a:p>
-          <a:p>
-            <a:pPr algn="l">
+            <a:pPr>
+              <a:defRPr sz="1300">
+                <a:solidFill>
+                  <a:srgbClr val="DCDCDC"/>
+                </a:solidFill>
+                <a:latin typeface="Consolas"/>
+              </a:defRPr>
+            </a:pPr>
+          </a:p>
+          <a:p>
+            <a:pPr>
               <a:defRPr sz="1300">
                 <a:solidFill>
                   <a:srgbClr val="DCDCDC"/>
@@ -5800,7 +5871,7 @@
             </a:r>
           </a:p>
           <a:p>
-            <a:pPr algn="l">
+            <a:pPr>
               <a:defRPr sz="1300">
                 <a:solidFill>
                   <a:srgbClr val="DCDCDC"/>
@@ -5911,12 +5982,12 @@
           </a:solidFill>
         </p:spPr>
         <p:txBody>
-          <a:bodyPr wrap="square">
+          <a:bodyPr wrap="none">
             <a:spAutoFit/>
           </a:bodyPr>
           <a:lstStyle/>
           <a:p>
-            <a:pPr algn="l">
+            <a:pPr>
               <a:defRPr sz="1300">
                 <a:solidFill>
                   <a:srgbClr val="DCDCDC"/>
@@ -5929,7 +6000,7 @@
             </a:r>
           </a:p>
           <a:p>
-            <a:pPr algn="l">
+            <a:pPr>
               <a:defRPr sz="1300">
                 <a:solidFill>
                   <a:srgbClr val="DCDCDC"/>
@@ -5942,17 +6013,17 @@
             </a:r>
           </a:p>
           <a:p>
-            <a:pPr algn="l">
-              <a:defRPr sz="1300">
-                <a:solidFill>
-                  <a:srgbClr val="DCDCDC"/>
-                </a:solidFill>
-                <a:latin typeface="Consolas"/>
-              </a:defRPr>
-            </a:pPr>
-          </a:p>
-          <a:p>
-            <a:pPr algn="l">
+            <a:pPr>
+              <a:defRPr sz="1300">
+                <a:solidFill>
+                  <a:srgbClr val="DCDCDC"/>
+                </a:solidFill>
+                <a:latin typeface="Consolas"/>
+              </a:defRPr>
+            </a:pPr>
+          </a:p>
+          <a:p>
+            <a:pPr>
               <a:defRPr sz="1300">
                 <a:solidFill>
                   <a:srgbClr val="DCDCDC"/>
@@ -5965,7 +6036,7 @@
             </a:r>
           </a:p>
           <a:p>
-            <a:pPr algn="l">
+            <a:pPr>
               <a:defRPr sz="1300">
                 <a:solidFill>
                   <a:srgbClr val="DCDCDC"/>
@@ -5978,7 +6049,7 @@
             </a:r>
           </a:p>
           <a:p>
-            <a:pPr algn="l">
+            <a:pPr>
               <a:defRPr sz="1300">
                 <a:solidFill>
                   <a:srgbClr val="DCDCDC"/>
@@ -5991,7 +6062,7 @@
             </a:r>
           </a:p>
           <a:p>
-            <a:pPr algn="l">
+            <a:pPr>
               <a:defRPr sz="1300">
                 <a:solidFill>
                   <a:srgbClr val="DCDCDC"/>
@@ -6102,12 +6173,12 @@
           </a:solidFill>
         </p:spPr>
         <p:txBody>
-          <a:bodyPr wrap="square">
+          <a:bodyPr wrap="none">
             <a:spAutoFit/>
           </a:bodyPr>
           <a:lstStyle/>
           <a:p>
-            <a:pPr algn="l">
+            <a:pPr>
               <a:defRPr sz="1300">
                 <a:solidFill>
                   <a:srgbClr val="DCDCDC"/>
@@ -6120,7 +6191,7 @@
             </a:r>
           </a:p>
           <a:p>
-            <a:pPr algn="l">
+            <a:pPr>
               <a:defRPr sz="1300">
                 <a:solidFill>
                   <a:srgbClr val="DCDCDC"/>
@@ -6133,17 +6204,17 @@
             </a:r>
           </a:p>
           <a:p>
-            <a:pPr algn="l">
-              <a:defRPr sz="1300">
-                <a:solidFill>
-                  <a:srgbClr val="DCDCDC"/>
-                </a:solidFill>
-                <a:latin typeface="Consolas"/>
-              </a:defRPr>
-            </a:pPr>
-          </a:p>
-          <a:p>
-            <a:pPr algn="l">
+            <a:pPr>
+              <a:defRPr sz="1300">
+                <a:solidFill>
+                  <a:srgbClr val="DCDCDC"/>
+                </a:solidFill>
+                <a:latin typeface="Consolas"/>
+              </a:defRPr>
+            </a:pPr>
+          </a:p>
+          <a:p>
+            <a:pPr>
               <a:defRPr sz="1300">
                 <a:solidFill>
                   <a:srgbClr val="DCDCDC"/>
@@ -6156,7 +6227,7 @@
             </a:r>
           </a:p>
           <a:p>
-            <a:pPr algn="l">
+            <a:pPr>
               <a:defRPr sz="1300">
                 <a:solidFill>
                   <a:srgbClr val="DCDCDC"/>
@@ -6169,17 +6240,17 @@
             </a:r>
           </a:p>
           <a:p>
-            <a:pPr algn="l">
-              <a:defRPr sz="1300">
-                <a:solidFill>
-                  <a:srgbClr val="DCDCDC"/>
-                </a:solidFill>
-                <a:latin typeface="Consolas"/>
-              </a:defRPr>
-            </a:pPr>
-          </a:p>
-          <a:p>
-            <a:pPr algn="l">
+            <a:pPr>
+              <a:defRPr sz="1300">
+                <a:solidFill>
+                  <a:srgbClr val="DCDCDC"/>
+                </a:solidFill>
+                <a:latin typeface="Consolas"/>
+              </a:defRPr>
+            </a:pPr>
+          </a:p>
+          <a:p>
+            <a:pPr>
               <a:defRPr sz="1300">
                 <a:solidFill>
                   <a:srgbClr val="DCDCDC"/>
@@ -6192,7 +6263,7 @@
             </a:r>
           </a:p>
           <a:p>
-            <a:pPr algn="l">
+            <a:pPr>
               <a:defRPr sz="1300">
                 <a:solidFill>
                   <a:srgbClr val="DCDCDC"/>
@@ -6284,73 +6355,9 @@
           </a:p>
         </p:txBody>
       </p:sp>
-      <p:sp>
-        <p:nvSpPr>
-          <p:cNvPr id="3" name="TextBox 2"/>
-          <p:cNvSpPr txBox="1"/>
-          <p:nvPr/>
-        </p:nvSpPr>
-        <p:spPr>
-          <a:xfrm>
-            <a:off x="457200" y="1371600"/>
-            <a:ext cx="5943600" cy="5029200"/>
-          </a:xfrm>
-          <a:prstGeom prst="rect">
-            <a:avLst/>
-          </a:prstGeom>
-          <a:solidFill>
-            <a:srgbClr val="1E1E1E"/>
-          </a:solidFill>
-        </p:spPr>
-        <p:txBody>
-          <a:bodyPr wrap="square">
-            <a:spAutoFit/>
-          </a:bodyPr>
-          <a:lstStyle/>
-          <a:p>
-            <a:pPr algn="l">
-              <a:defRPr sz="1300">
-                <a:solidFill>
-                  <a:srgbClr val="DCDCDC"/>
-                </a:solidFill>
-                <a:latin typeface="Consolas"/>
-              </a:defRPr>
-            </a:pPr>
-            <a:r>
-              <a:t>// Throughput at Scale (1M entities)</a:t>
-            </a:r>
-          </a:p>
-          <a:p>
-            <a:pPr algn="l">
-              <a:defRPr sz="1300">
-                <a:solidFill>
-                  <a:srgbClr val="DCDCDC"/>
-                </a:solidFill>
-                <a:latin typeface="Consolas"/>
-              </a:defRPr>
-            </a:pPr>
-            <a:r>
-              <a:t>// Classic ECS: 19.26 Gi/s</a:t>
-            </a:r>
-          </a:p>
-          <a:p>
-            <a:pPr algn="l">
-              <a:defRPr sz="1300">
-                <a:solidFill>
-                  <a:srgbClr val="DCDCDC"/>
-                </a:solidFill>
-                <a:latin typeface="Consolas"/>
-              </a:defRPr>
-            </a:pPr>
-            <a:r>
-              <a:t>// CRG Projection: 30.83 Gi/s</a:t>
-            </a:r>
-          </a:p>
-        </p:txBody>
-      </p:sp>
       <p:pic>
         <p:nvPicPr>
-          <p:cNvPr id="4" name="Picture 3" descr="image.jpg"/>
+          <p:cNvPr id="3" name="Picture 2" descr="crg_benchmark_final_20260501_003619.png"/>
           <p:cNvPicPr>
             <a:picLocks noChangeAspect="1"/>
           </p:cNvPicPr>
@@ -6364,14 +6371,77 @@
         </p:blipFill>
         <p:spPr>
           <a:xfrm>
-            <a:off x="6583680" y="1645920"/>
-            <a:ext cx="5029200" cy="1663652"/>
+            <a:off x="457200" y="1645920"/>
+            <a:ext cx="4114800" cy="2743200"/>
           </a:xfrm>
           <a:prstGeom prst="rect">
             <a:avLst/>
           </a:prstGeom>
         </p:spPr>
       </p:pic>
+      <p:pic>
+        <p:nvPicPr>
+          <p:cNvPr id="4" name="Picture 3" descr="simulator_qr.png"/>
+          <p:cNvPicPr>
+            <a:picLocks noChangeAspect="1"/>
+          </p:cNvPicPr>
+          <p:nvPr/>
+        </p:nvPicPr>
+        <p:blipFill>
+          <a:blip r:embed="rId3"/>
+          <a:stretch>
+            <a:fillRect/>
+          </a:stretch>
+        </p:blipFill>
+        <p:spPr>
+          <a:xfrm>
+            <a:off x="9601200" y="1645920"/>
+            <a:ext cx="2011680" cy="2011680"/>
+          </a:xfrm>
+          <a:prstGeom prst="rect">
+            <a:avLst/>
+          </a:prstGeom>
+        </p:spPr>
+      </p:pic>
+      <p:sp>
+        <p:nvSpPr>
+          <p:cNvPr id="5" name="TextBox 4"/>
+          <p:cNvSpPr txBox="1"/>
+          <p:nvPr/>
+        </p:nvSpPr>
+        <p:spPr>
+          <a:xfrm>
+            <a:off x="9601200" y="3749039"/>
+            <a:ext cx="2011680" cy="914400"/>
+          </a:xfrm>
+          <a:prstGeom prst="rect">
+            <a:avLst/>
+          </a:prstGeom>
+          <a:noFill/>
+        </p:spPr>
+        <p:txBody>
+          <a:bodyPr wrap="none">
+            <a:spAutoFit/>
+          </a:bodyPr>
+          <a:lstStyle/>
+          <a:p>
+            <a:pPr algn="ctr">
+              <a:defRPr sz="1200">
+                <a:solidFill>
+                  <a:srgbClr val="DCDCDC"/>
+                </a:solidFill>
+              </a:defRPr>
+            </a:pPr>
+            <a:r>
+              <a:t>Scan to challenge</a:t>
+            </a:r>
+            <a:br/>
+            <a:r>
+              <a:t>these results live</a:t>
+            </a:r>
+          </a:p>
+        </p:txBody>
+      </p:sp>
     </p:spTree>
   </p:cSld>
   <p:clrMapOvr>
@@ -6421,7 +6491,148 @@
               </a:defRPr>
             </a:pPr>
             <a:r>
-              <a:t>17 - CONCLUSION</a:t>
+              <a:t>17 - STRESS TEST SIMULATION (High Volatility)</a:t>
+            </a:r>
+          </a:p>
+        </p:txBody>
+      </p:sp>
+      <p:pic>
+        <p:nvPicPr>
+          <p:cNvPr id="3" name="Picture 2" descr="crg_benchmark_final_20260501_003619.png"/>
+          <p:cNvPicPr>
+            <a:picLocks noChangeAspect="1"/>
+          </p:cNvPicPr>
+          <p:nvPr/>
+        </p:nvPicPr>
+        <p:blipFill>
+          <a:blip r:embed="rId2"/>
+          <a:stretch>
+            <a:fillRect/>
+          </a:stretch>
+        </p:blipFill>
+        <p:spPr>
+          <a:xfrm>
+            <a:off x="457200" y="1645920"/>
+            <a:ext cx="4114800" cy="2743200"/>
+          </a:xfrm>
+          <a:prstGeom prst="rect">
+            <a:avLst/>
+          </a:prstGeom>
+        </p:spPr>
+      </p:pic>
+      <p:pic>
+        <p:nvPicPr>
+          <p:cNvPr id="4" name="Picture 3" descr="simulator_qr.png"/>
+          <p:cNvPicPr>
+            <a:picLocks noChangeAspect="1"/>
+          </p:cNvPicPr>
+          <p:nvPr/>
+        </p:nvPicPr>
+        <p:blipFill>
+          <a:blip r:embed="rId3"/>
+          <a:stretch>
+            <a:fillRect/>
+          </a:stretch>
+        </p:blipFill>
+        <p:spPr>
+          <a:xfrm>
+            <a:off x="9601200" y="1645920"/>
+            <a:ext cx="2011680" cy="2011680"/>
+          </a:xfrm>
+          <a:prstGeom prst="rect">
+            <a:avLst/>
+          </a:prstGeom>
+        </p:spPr>
+      </p:pic>
+      <p:sp>
+        <p:nvSpPr>
+          <p:cNvPr id="5" name="TextBox 4"/>
+          <p:cNvSpPr txBox="1"/>
+          <p:nvPr/>
+        </p:nvSpPr>
+        <p:spPr>
+          <a:xfrm>
+            <a:off x="9601200" y="3749039"/>
+            <a:ext cx="2011680" cy="914400"/>
+          </a:xfrm>
+          <a:prstGeom prst="rect">
+            <a:avLst/>
+          </a:prstGeom>
+          <a:noFill/>
+        </p:spPr>
+        <p:txBody>
+          <a:bodyPr wrap="none">
+            <a:spAutoFit/>
+          </a:bodyPr>
+          <a:lstStyle/>
+          <a:p>
+            <a:pPr algn="ctr">
+              <a:defRPr sz="1200">
+                <a:solidFill>
+                  <a:srgbClr val="DCDCDC"/>
+                </a:solidFill>
+              </a:defRPr>
+            </a:pPr>
+            <a:r>
+              <a:t>Scan to challenge</a:t>
+            </a:r>
+            <a:br/>
+            <a:r>
+              <a:t>these results live</a:t>
+            </a:r>
+          </a:p>
+        </p:txBody>
+      </p:sp>
+    </p:spTree>
+  </p:cSld>
+  <p:clrMapOvr>
+    <a:masterClrMapping/>
+  </p:clrMapOvr>
+</p:sld>
+</file>
+
+<file path=ppt/slides/slide19.xml><?xml version="1.0" encoding="utf-8"?>
+<p:sld xmlns:a="http://schemas.openxmlformats.org/drawingml/2006/main" xmlns:p="http://schemas.openxmlformats.org/presentationml/2006/main" xmlns:r="http://schemas.openxmlformats.org/officeDocument/2006/relationships">
+  <p:cSld>
+    <p:bg>
+      <p:bgPr>
+        <a:solidFill>
+          <a:srgbClr val="0F0F0F"/>
+        </a:solidFill>
+        <a:effectLst/>
+      </p:bgPr>
+    </p:bg>
+    <p:spTree>
+      <p:nvGrpSpPr>
+        <p:cNvPr id="1" name=""/>
+        <p:cNvGrpSpPr/>
+        <p:nvPr/>
+      </p:nvGrpSpPr>
+      <p:grpSpPr/>
+      <p:sp>
+        <p:nvSpPr>
+          <p:cNvPr id="2" name="Title 1"/>
+          <p:cNvSpPr>
+            <a:spLocks noGrp="1"/>
+          </p:cNvSpPr>
+          <p:nvPr>
+            <p:ph type="title"/>
+          </p:nvPr>
+        </p:nvSpPr>
+        <p:spPr/>
+        <p:txBody>
+          <a:bodyPr/>
+          <a:lstStyle/>
+          <a:p>
+            <a:pPr>
+              <a:defRPr sz="3600">
+                <a:solidFill>
+                  <a:srgbClr val="6496FF"/>
+                </a:solidFill>
+              </a:defRPr>
+            </a:pPr>
+            <a:r>
+              <a:t>18 - CONCLUSION</a:t>
             </a:r>
           </a:p>
         </p:txBody>
@@ -6445,12 +6656,12 @@
           </a:solidFill>
         </p:spPr>
         <p:txBody>
-          <a:bodyPr wrap="square">
+          <a:bodyPr wrap="none">
             <a:spAutoFit/>
           </a:bodyPr>
           <a:lstStyle/>
           <a:p>
-            <a:pPr algn="l">
+            <a:pPr>
               <a:defRPr sz="1300">
                 <a:solidFill>
                   <a:srgbClr val="DCDCDC"/>
@@ -6463,7 +6674,7 @@
             </a:r>
           </a:p>
           <a:p>
-            <a:pPr algn="l">
+            <a:pPr>
               <a:defRPr sz="1300">
                 <a:solidFill>
                   <a:srgbClr val="DCDCDC"/>
@@ -6476,7 +6687,7 @@
             </a:r>
           </a:p>
           <a:p>
-            <a:pPr algn="l">
+            <a:pPr>
               <a:defRPr sz="1300">
                 <a:solidFill>
                   <a:srgbClr val="DCDCDC"/>
@@ -6489,17 +6700,17 @@
             </a:r>
           </a:p>
           <a:p>
-            <a:pPr algn="l">
-              <a:defRPr sz="1300">
-                <a:solidFill>
-                  <a:srgbClr val="DCDCDC"/>
-                </a:solidFill>
-                <a:latin typeface="Consolas"/>
-              </a:defRPr>
-            </a:pPr>
-          </a:p>
-          <a:p>
-            <a:pPr algn="l">
+            <a:pPr>
+              <a:defRPr sz="1300">
+                <a:solidFill>
+                  <a:srgbClr val="DCDCDC"/>
+                </a:solidFill>
+                <a:latin typeface="Consolas"/>
+              </a:defRPr>
+            </a:pPr>
+          </a:p>
+          <a:p>
+            <a:pPr>
               <a:defRPr sz="1300">
                 <a:solidFill>
                   <a:srgbClr val="DCDCDC"/>
@@ -6512,7 +6723,7 @@
             </a:r>
           </a:p>
           <a:p>
-            <a:pPr algn="l">
+            <a:pPr>
               <a:defRPr sz="1300">
                 <a:solidFill>
                   <a:srgbClr val="DCDCDC"/>
@@ -6623,12 +6834,12 @@
           </a:solidFill>
         </p:spPr>
         <p:txBody>
-          <a:bodyPr wrap="square">
+          <a:bodyPr wrap="none">
             <a:spAutoFit/>
           </a:bodyPr>
           <a:lstStyle/>
           <a:p>
-            <a:pPr algn="l">
+            <a:pPr>
               <a:defRPr sz="1300">
                 <a:solidFill>
                   <a:srgbClr val="DCDCDC"/>
@@ -6641,7 +6852,7 @@
             </a:r>
           </a:p>
           <a:p>
-            <a:pPr algn="l">
+            <a:pPr>
               <a:defRPr sz="1300">
                 <a:solidFill>
                   <a:srgbClr val="DCDCDC"/>
@@ -6654,7 +6865,7 @@
             </a:r>
           </a:p>
           <a:p>
-            <a:pPr algn="l">
+            <a:pPr>
               <a:defRPr sz="1300">
                 <a:solidFill>
                   <a:srgbClr val="DCDCDC"/>
@@ -6667,7 +6878,7 @@
             </a:r>
           </a:p>
           <a:p>
-            <a:pPr algn="l">
+            <a:pPr>
               <a:defRPr sz="1300">
                 <a:solidFill>
                   <a:srgbClr val="DCDCDC"/>
@@ -6680,17 +6891,17 @@
             </a:r>
           </a:p>
           <a:p>
-            <a:pPr algn="l">
-              <a:defRPr sz="1300">
-                <a:solidFill>
-                  <a:srgbClr val="DCDCDC"/>
-                </a:solidFill>
-                <a:latin typeface="Consolas"/>
-              </a:defRPr>
-            </a:pPr>
-          </a:p>
-          <a:p>
-            <a:pPr algn="l">
+            <a:pPr>
+              <a:defRPr sz="1300">
+                <a:solidFill>
+                  <a:srgbClr val="DCDCDC"/>
+                </a:solidFill>
+                <a:latin typeface="Consolas"/>
+              </a:defRPr>
+            </a:pPr>
+          </a:p>
+          <a:p>
+            <a:pPr>
               <a:defRPr sz="1300">
                 <a:solidFill>
                   <a:srgbClr val="DCDCDC"/>
@@ -6703,7 +6914,7 @@
             </a:r>
           </a:p>
           <a:p>
-            <a:pPr algn="l">
+            <a:pPr>
               <a:defRPr sz="1300">
                 <a:solidFill>
                   <a:srgbClr val="DCDCDC"/>
@@ -6716,7 +6927,7 @@
             </a:r>
           </a:p>
           <a:p>
-            <a:pPr algn="l">
+            <a:pPr>
               <a:defRPr sz="1300">
                 <a:solidFill>
                   <a:srgbClr val="DCDCDC"/>
@@ -6827,12 +7038,12 @@
           </a:solidFill>
         </p:spPr>
         <p:txBody>
-          <a:bodyPr wrap="square">
+          <a:bodyPr wrap="none">
             <a:spAutoFit/>
           </a:bodyPr>
           <a:lstStyle/>
           <a:p>
-            <a:pPr algn="l">
+            <a:pPr>
               <a:defRPr sz="1300">
                 <a:solidFill>
                   <a:srgbClr val="DCDCDC"/>
@@ -6845,7 +7056,7 @@
             </a:r>
           </a:p>
           <a:p>
-            <a:pPr algn="l">
+            <a:pPr>
               <a:defRPr sz="1300">
                 <a:solidFill>
                   <a:srgbClr val="DCDCDC"/>
@@ -6858,7 +7069,7 @@
             </a:r>
           </a:p>
           <a:p>
-            <a:pPr algn="l">
+            <a:pPr>
               <a:defRPr sz="1300">
                 <a:solidFill>
                   <a:srgbClr val="DCDCDC"/>
@@ -6871,17 +7082,17 @@
             </a:r>
           </a:p>
           <a:p>
-            <a:pPr algn="l">
-              <a:defRPr sz="1300">
-                <a:solidFill>
-                  <a:srgbClr val="DCDCDC"/>
-                </a:solidFill>
-                <a:latin typeface="Consolas"/>
-              </a:defRPr>
-            </a:pPr>
-          </a:p>
-          <a:p>
-            <a:pPr algn="l">
+            <a:pPr>
+              <a:defRPr sz="1300">
+                <a:solidFill>
+                  <a:srgbClr val="DCDCDC"/>
+                </a:solidFill>
+                <a:latin typeface="Consolas"/>
+              </a:defRPr>
+            </a:pPr>
+          </a:p>
+          <a:p>
+            <a:pPr>
               <a:defRPr sz="1300">
                 <a:solidFill>
                   <a:srgbClr val="DCDCDC"/>
@@ -6894,7 +7105,7 @@
             </a:r>
           </a:p>
           <a:p>
-            <a:pPr algn="l">
+            <a:pPr>
               <a:defRPr sz="1300">
                 <a:solidFill>
                   <a:srgbClr val="DCDCDC"/>
@@ -6907,7 +7118,7 @@
             </a:r>
           </a:p>
           <a:p>
-            <a:pPr algn="l">
+            <a:pPr>
               <a:defRPr sz="1300">
                 <a:solidFill>
                   <a:srgbClr val="DCDCDC"/>
@@ -6920,7 +7131,7 @@
             </a:r>
           </a:p>
           <a:p>
-            <a:pPr algn="l">
+            <a:pPr>
               <a:defRPr sz="1300">
                 <a:solidFill>
                   <a:srgbClr val="DCDCDC"/>
@@ -6933,7 +7144,7 @@
             </a:r>
           </a:p>
           <a:p>
-            <a:pPr algn="l">
+            <a:pPr>
               <a:defRPr sz="1300">
                 <a:solidFill>
                   <a:srgbClr val="DCDCDC"/>
@@ -7044,12 +7255,12 @@
           </a:solidFill>
         </p:spPr>
         <p:txBody>
-          <a:bodyPr wrap="square">
+          <a:bodyPr wrap="none">
             <a:spAutoFit/>
           </a:bodyPr>
           <a:lstStyle/>
           <a:p>
-            <a:pPr algn="l">
+            <a:pPr>
               <a:defRPr sz="1300">
                 <a:solidFill>
                   <a:srgbClr val="DCDCDC"/>
@@ -7062,7 +7273,7 @@
             </a:r>
           </a:p>
           <a:p>
-            <a:pPr algn="l">
+            <a:pPr>
               <a:defRPr sz="1300">
                 <a:solidFill>
                   <a:srgbClr val="DCDCDC"/>
@@ -7075,7 +7286,7 @@
             </a:r>
           </a:p>
           <a:p>
-            <a:pPr algn="l">
+            <a:pPr>
               <a:defRPr sz="1300">
                 <a:solidFill>
                   <a:srgbClr val="DCDCDC"/>
@@ -7088,7 +7299,7 @@
             </a:r>
           </a:p>
           <a:p>
-            <a:pPr algn="l">
+            <a:pPr>
               <a:defRPr sz="1300">
                 <a:solidFill>
                   <a:srgbClr val="DCDCDC"/>
@@ -7101,17 +7312,17 @@
             </a:r>
           </a:p>
           <a:p>
-            <a:pPr algn="l">
-              <a:defRPr sz="1300">
-                <a:solidFill>
-                  <a:srgbClr val="DCDCDC"/>
-                </a:solidFill>
-                <a:latin typeface="Consolas"/>
-              </a:defRPr>
-            </a:pPr>
-          </a:p>
-          <a:p>
-            <a:pPr algn="l">
+            <a:pPr>
+              <a:defRPr sz="1300">
+                <a:solidFill>
+                  <a:srgbClr val="DCDCDC"/>
+                </a:solidFill>
+                <a:latin typeface="Consolas"/>
+              </a:defRPr>
+            </a:pPr>
+          </a:p>
+          <a:p>
+            <a:pPr>
               <a:defRPr sz="1300">
                 <a:solidFill>
                   <a:srgbClr val="DCDCDC"/>
@@ -7124,7 +7335,7 @@
             </a:r>
           </a:p>
           <a:p>
-            <a:pPr algn="l">
+            <a:pPr>
               <a:defRPr sz="1300">
                 <a:solidFill>
                   <a:srgbClr val="DCDCDC"/>
@@ -7137,7 +7348,7 @@
             </a:r>
           </a:p>
           <a:p>
-            <a:pPr algn="l">
+            <a:pPr>
               <a:defRPr sz="1300">
                 <a:solidFill>
                   <a:srgbClr val="DCDCDC"/>
@@ -7248,12 +7459,12 @@
           </a:solidFill>
         </p:spPr>
         <p:txBody>
-          <a:bodyPr wrap="square">
+          <a:bodyPr wrap="none">
             <a:spAutoFit/>
           </a:bodyPr>
           <a:lstStyle/>
           <a:p>
-            <a:pPr algn="l">
+            <a:pPr>
               <a:defRPr sz="1300">
                 <a:solidFill>
                   <a:srgbClr val="DCDCDC"/>
@@ -7266,7 +7477,7 @@
             </a:r>
           </a:p>
           <a:p>
-            <a:pPr algn="l">
+            <a:pPr>
               <a:defRPr sz="1300">
                 <a:solidFill>
                   <a:srgbClr val="DCDCDC"/>
@@ -7279,7 +7490,7 @@
             </a:r>
           </a:p>
           <a:p>
-            <a:pPr algn="l">
+            <a:pPr>
               <a:defRPr sz="1300">
                 <a:solidFill>
                   <a:srgbClr val="DCDCDC"/>
@@ -7292,7 +7503,7 @@
             </a:r>
           </a:p>
           <a:p>
-            <a:pPr algn="l">
+            <a:pPr>
               <a:defRPr sz="1300">
                 <a:solidFill>
                   <a:srgbClr val="DCDCDC"/>
@@ -7305,7 +7516,7 @@
             </a:r>
           </a:p>
           <a:p>
-            <a:pPr algn="l">
+            <a:pPr>
               <a:defRPr sz="1300">
                 <a:solidFill>
                   <a:srgbClr val="DCDCDC"/>
@@ -7318,7 +7529,7 @@
             </a:r>
           </a:p>
           <a:p>
-            <a:pPr algn="l">
+            <a:pPr>
               <a:defRPr sz="1300">
                 <a:solidFill>
                   <a:srgbClr val="DCDCDC"/>
@@ -7331,7 +7542,7 @@
             </a:r>
           </a:p>
           <a:p>
-            <a:pPr algn="l">
+            <a:pPr>
               <a:defRPr sz="1300">
                 <a:solidFill>
                   <a:srgbClr val="DCDCDC"/>
@@ -7344,7 +7555,7 @@
             </a:r>
           </a:p>
           <a:p>
-            <a:pPr algn="l">
+            <a:pPr>
               <a:defRPr sz="1300">
                 <a:solidFill>
                   <a:srgbClr val="DCDCDC"/>
@@ -7357,7 +7568,7 @@
             </a:r>
           </a:p>
           <a:p>
-            <a:pPr algn="l">
+            <a:pPr>
               <a:defRPr sz="1300">
                 <a:solidFill>
                   <a:srgbClr val="DCDCDC"/>
@@ -7468,12 +7679,12 @@
           </a:solidFill>
         </p:spPr>
         <p:txBody>
-          <a:bodyPr wrap="square">
+          <a:bodyPr wrap="none">
             <a:spAutoFit/>
           </a:bodyPr>
           <a:lstStyle/>
           <a:p>
-            <a:pPr algn="l">
+            <a:pPr>
               <a:defRPr sz="1300">
                 <a:solidFill>
                   <a:srgbClr val="DCDCDC"/>
@@ -7486,7 +7697,7 @@
             </a:r>
           </a:p>
           <a:p>
-            <a:pPr algn="l">
+            <a:pPr>
               <a:defRPr sz="1300">
                 <a:solidFill>
                   <a:srgbClr val="DCDCDC"/>
@@ -7499,7 +7710,7 @@
             </a:r>
           </a:p>
           <a:p>
-            <a:pPr algn="l">
+            <a:pPr>
               <a:defRPr sz="1300">
                 <a:solidFill>
                   <a:srgbClr val="DCDCDC"/>
@@ -7512,7 +7723,7 @@
             </a:r>
           </a:p>
           <a:p>
-            <a:pPr algn="l">
+            <a:pPr>
               <a:defRPr sz="1300">
                 <a:solidFill>
                   <a:srgbClr val="DCDCDC"/>
@@ -7525,17 +7736,17 @@
             </a:r>
           </a:p>
           <a:p>
-            <a:pPr algn="l">
-              <a:defRPr sz="1300">
-                <a:solidFill>
-                  <a:srgbClr val="DCDCDC"/>
-                </a:solidFill>
-                <a:latin typeface="Consolas"/>
-              </a:defRPr>
-            </a:pPr>
-          </a:p>
-          <a:p>
-            <a:pPr algn="l">
+            <a:pPr>
+              <a:defRPr sz="1300">
+                <a:solidFill>
+                  <a:srgbClr val="DCDCDC"/>
+                </a:solidFill>
+                <a:latin typeface="Consolas"/>
+              </a:defRPr>
+            </a:pPr>
+          </a:p>
+          <a:p>
+            <a:pPr>
               <a:defRPr sz="1300">
                 <a:solidFill>
                   <a:srgbClr val="DCDCDC"/>
@@ -7548,7 +7759,7 @@
             </a:r>
           </a:p>
           <a:p>
-            <a:pPr algn="l">
+            <a:pPr>
               <a:defRPr sz="1300">
                 <a:solidFill>
                   <a:srgbClr val="DCDCDC"/>
@@ -7561,7 +7772,7 @@
             </a:r>
           </a:p>
           <a:p>
-            <a:pPr algn="l">
+            <a:pPr>
               <a:defRPr sz="1300">
                 <a:solidFill>
                   <a:srgbClr val="DCDCDC"/>
@@ -7574,7 +7785,7 @@
             </a:r>
           </a:p>
           <a:p>
-            <a:pPr algn="l">
+            <a:pPr>
               <a:defRPr sz="1300">
                 <a:solidFill>
                   <a:srgbClr val="DCDCDC"/>
@@ -7587,7 +7798,7 @@
             </a:r>
           </a:p>
           <a:p>
-            <a:pPr algn="l">
+            <a:pPr>
               <a:defRPr sz="1300">
                 <a:solidFill>
                   <a:srgbClr val="DCDCDC"/>
@@ -7600,7 +7811,7 @@
             </a:r>
           </a:p>
           <a:p>
-            <a:pPr algn="l">
+            <a:pPr>
               <a:defRPr sz="1300">
                 <a:solidFill>
                   <a:srgbClr val="DCDCDC"/>
@@ -7711,12 +7922,12 @@
           </a:solidFill>
         </p:spPr>
         <p:txBody>
-          <a:bodyPr wrap="square">
+          <a:bodyPr wrap="none">
             <a:spAutoFit/>
           </a:bodyPr>
           <a:lstStyle/>
           <a:p>
-            <a:pPr algn="l">
+            <a:pPr>
               <a:defRPr sz="1300">
                 <a:solidFill>
                   <a:srgbClr val="DCDCDC"/>
@@ -7729,7 +7940,7 @@
             </a:r>
           </a:p>
           <a:p>
-            <a:pPr algn="l">
+            <a:pPr>
               <a:defRPr sz="1300">
                 <a:solidFill>
                   <a:srgbClr val="DCDCDC"/>
@@ -7742,17 +7953,17 @@
             </a:r>
           </a:p>
           <a:p>
-            <a:pPr algn="l">
-              <a:defRPr sz="1300">
-                <a:solidFill>
-                  <a:srgbClr val="DCDCDC"/>
-                </a:solidFill>
-                <a:latin typeface="Consolas"/>
-              </a:defRPr>
-            </a:pPr>
-          </a:p>
-          <a:p>
-            <a:pPr algn="l">
+            <a:pPr>
+              <a:defRPr sz="1300">
+                <a:solidFill>
+                  <a:srgbClr val="DCDCDC"/>
+                </a:solidFill>
+                <a:latin typeface="Consolas"/>
+              </a:defRPr>
+            </a:pPr>
+          </a:p>
+          <a:p>
+            <a:pPr>
               <a:defRPr sz="1300">
                 <a:solidFill>
                   <a:srgbClr val="DCDCDC"/>
@@ -7765,7 +7976,7 @@
             </a:r>
           </a:p>
           <a:p>
-            <a:pPr algn="l">
+            <a:pPr>
               <a:defRPr sz="1300">
                 <a:solidFill>
                   <a:srgbClr val="DCDCDC"/>
@@ -7778,7 +7989,7 @@
             </a:r>
           </a:p>
           <a:p>
-            <a:pPr algn="l">
+            <a:pPr>
               <a:defRPr sz="1300">
                 <a:solidFill>
                   <a:srgbClr val="DCDCDC"/>
@@ -7791,7 +8002,7 @@
             </a:r>
           </a:p>
           <a:p>
-            <a:pPr algn="l">
+            <a:pPr>
               <a:defRPr sz="1300">
                 <a:solidFill>
                   <a:srgbClr val="DCDCDC"/>
@@ -7804,17 +8015,17 @@
             </a:r>
           </a:p>
           <a:p>
-            <a:pPr algn="l">
-              <a:defRPr sz="1300">
-                <a:solidFill>
-                  <a:srgbClr val="DCDCDC"/>
-                </a:solidFill>
-                <a:latin typeface="Consolas"/>
-              </a:defRPr>
-            </a:pPr>
-          </a:p>
-          <a:p>
-            <a:pPr algn="l">
+            <a:pPr>
+              <a:defRPr sz="1300">
+                <a:solidFill>
+                  <a:srgbClr val="DCDCDC"/>
+                </a:solidFill>
+                <a:latin typeface="Consolas"/>
+              </a:defRPr>
+            </a:pPr>
+          </a:p>
+          <a:p>
+            <a:pPr>
               <a:defRPr sz="1300">
                 <a:solidFill>
                   <a:srgbClr val="DCDCDC"/>
@@ -7827,7 +8038,7 @@
             </a:r>
           </a:p>
           <a:p>
-            <a:pPr algn="l">
+            <a:pPr>
               <a:defRPr sz="1300">
                 <a:solidFill>
                   <a:srgbClr val="DCDCDC"/>
@@ -7938,12 +8149,12 @@
           </a:solidFill>
         </p:spPr>
         <p:txBody>
-          <a:bodyPr wrap="square">
+          <a:bodyPr wrap="none">
             <a:spAutoFit/>
           </a:bodyPr>
           <a:lstStyle/>
           <a:p>
-            <a:pPr algn="l">
+            <a:pPr>
               <a:defRPr sz="1300">
                 <a:solidFill>
                   <a:srgbClr val="DCDCDC"/>
@@ -7956,7 +8167,7 @@
             </a:r>
           </a:p>
           <a:p>
-            <a:pPr algn="l">
+            <a:pPr>
               <a:defRPr sz="1300">
                 <a:solidFill>
                   <a:srgbClr val="DCDCDC"/>
@@ -7969,17 +8180,17 @@
             </a:r>
           </a:p>
           <a:p>
-            <a:pPr algn="l">
-              <a:defRPr sz="1300">
-                <a:solidFill>
-                  <a:srgbClr val="DCDCDC"/>
-                </a:solidFill>
-                <a:latin typeface="Consolas"/>
-              </a:defRPr>
-            </a:pPr>
-          </a:p>
-          <a:p>
-            <a:pPr algn="l">
+            <a:pPr>
+              <a:defRPr sz="1300">
+                <a:solidFill>
+                  <a:srgbClr val="DCDCDC"/>
+                </a:solidFill>
+                <a:latin typeface="Consolas"/>
+              </a:defRPr>
+            </a:pPr>
+          </a:p>
+          <a:p>
+            <a:pPr>
               <a:defRPr sz="1300">
                 <a:solidFill>
                   <a:srgbClr val="DCDCDC"/>
@@ -7992,7 +8203,7 @@
             </a:r>
           </a:p>
           <a:p>
-            <a:pPr algn="l">
+            <a:pPr>
               <a:defRPr sz="1300">
                 <a:solidFill>
                   <a:srgbClr val="DCDCDC"/>
@@ -8005,7 +8216,7 @@
             </a:r>
           </a:p>
           <a:p>
-            <a:pPr algn="l">
+            <a:pPr>
               <a:defRPr sz="1300">
                 <a:solidFill>
                   <a:srgbClr val="DCDCDC"/>
@@ -8018,7 +8229,7 @@
             </a:r>
           </a:p>
           <a:p>
-            <a:pPr algn="l">
+            <a:pPr>
               <a:defRPr sz="1300">
                 <a:solidFill>
                   <a:srgbClr val="DCDCDC"/>
@@ -8031,7 +8242,7 @@
             </a:r>
           </a:p>
           <a:p>
-            <a:pPr algn="l">
+            <a:pPr>
               <a:defRPr sz="1300">
                 <a:solidFill>
                   <a:srgbClr val="DCDCDC"/>
@@ -8142,12 +8353,12 @@
           </a:solidFill>
         </p:spPr>
         <p:txBody>
-          <a:bodyPr wrap="square">
+          <a:bodyPr wrap="none">
             <a:spAutoFit/>
           </a:bodyPr>
           <a:lstStyle/>
           <a:p>
-            <a:pPr algn="l">
+            <a:pPr>
               <a:defRPr sz="1300">
                 <a:solidFill>
                   <a:srgbClr val="DCDCDC"/>
@@ -8160,17 +8371,17 @@
             </a:r>
           </a:p>
           <a:p>
-            <a:pPr algn="l">
-              <a:defRPr sz="1300">
-                <a:solidFill>
-                  <a:srgbClr val="DCDCDC"/>
-                </a:solidFill>
-                <a:latin typeface="Consolas"/>
-              </a:defRPr>
-            </a:pPr>
-          </a:p>
-          <a:p>
-            <a:pPr algn="l">
+            <a:pPr>
+              <a:defRPr sz="1300">
+                <a:solidFill>
+                  <a:srgbClr val="DCDCDC"/>
+                </a:solidFill>
+                <a:latin typeface="Consolas"/>
+              </a:defRPr>
+            </a:pPr>
+          </a:p>
+          <a:p>
+            <a:pPr>
               <a:defRPr sz="1300">
                 <a:solidFill>
                   <a:srgbClr val="DCDCDC"/>
@@ -8183,7 +8394,7 @@
             </a:r>
           </a:p>
           <a:p>
-            <a:pPr algn="l">
+            <a:pPr>
               <a:defRPr sz="1300">
                 <a:solidFill>
                   <a:srgbClr val="DCDCDC"/>
